--- a/presentation/websockets-201-python/WebSockets_201_Python-r1.1.pptx
+++ b/presentation/websockets-201-python/WebSockets_201_Python-r1.1.pptx
@@ -824,7 +824,7 @@
           <a:p>
             <a:r>
               <a:rPr lang="en-US" dirty="0"/>
-              <a:t>Walks the Part 4 connection example (Ch12/13/14/17): the bounded outbound buffer, envelope-then-close error handling, the idle-timeout trap and the library's own ping/pong default, and JWT auth validated right after the upgrade completes.</a:t>
+              <a:t>Walks the Part 4 connection example (backpressure, error handling, liveness, and security): the bounded outbound buffer, envelope-then-close error handling, the idle-timeout trap and the library's own ping/pong default, and JWT auth validated right after the upgrade completes.</a:t>
             </a:r>
             <a:endParaRPr lang="en-US" dirty="0"/>
           </a:p>
@@ -912,7 +912,7 @@
           <a:p>
             <a:r>
               <a:rPr lang="en-US" dirty="0"/>
-              <a:t>Four concerns layer onto the same channel path: an auth gate before any data streams (Ch17), a bounded OutboundQueue feeding the replay (Ch12), a receive loop that rejects any client frame as a protocol error (Ch13), and ping_interval/ping_timeout handed straight to the library (Ch14). Every one of these is closed-source behavior on the Quarkus side too: same close codes, same shared secret.</a:t>
+              <a:t>Four concerns layer onto the same channel path: an auth gate before any data streams (security), a bounded OutboundQueue feeding the replay (backpressure), a receive loop that rejects any client frame as a protocol error (error handling), and ping_interval/ping_timeout handed straight to the library (liveness). Every one of these is closed-source behavior on the Quarkus side too: same close codes, same shared secret.</a:t>
             </a:r>
             <a:endParaRPr lang="en-US" dirty="0"/>
           </a:p>
@@ -1088,7 +1088,7 @@
           <a:p>
             <a:r>
               <a:rPr lang="en-US" dirty="0"/>
-              <a:t>The gotcha the appendix goes deeper on: `asyncio.Queue(maxsize=0)` means unbounded, not zero-capacity, the opposite of the intuitive reading, and exactly the setting that defeats this whole mechanism if someone 'simplifies' the env default. CLOSE_CODE_SLOW_CONSUMER (4290) lives in the 4000-4999 private-use range so it can't be confused with an RFC 6455 standard code, and it's a convention shared with the Quarkus sibling.</a:t>
+              <a:t>The detail the appendix goes deeper on: `asyncio.Queue(maxsize=0)` means unbounded, not zero-capacity, the opposite of the intuitive reading, and exactly the setting that defeats this whole mechanism if someone 'simplifies' the env default. CLOSE_CODE_SLOW_CONSUMER (4290) lives in the 4000-4999 private-use range so it can't be confused with an RFC 6455 standard code, and it's a convention shared with the Quarkus sibling.</a:t>
             </a:r>
             <a:endParaRPr lang="en-US" dirty="0"/>
           </a:p>
@@ -1528,7 +1528,7 @@
           <a:p>
             <a:r>
               <a:rPr lang="en-US" dirty="0"/>
-              <a:t>Six sections, the same order the chapters build in: the endpoint (Ch9), the four connection concerns (Ch12/13/14/17), reconnect and scale-out (Ch15/16/18), performance (Ch19/20), the toolbox (Ch21/22/23), and deploy. Appendix carries the model-generation pipeline, a deeper look at the backpressure gotcha, Kafka dedup, the Newman and k6 scripts, the drift-gate pipeline figure, and the version matrix. Cross-references to the Quarkus WebSockets Next sibling are by concept, 'the same close code on both stacks,' never by slide number, so the deck survives a trim.</a:t>
+              <a:t>Six sections, the same order the chapters build in: the endpoint (Python native websockets), the four connection concerns (backpressure and flow control, error handling, liveness and heartbeats, security), reconnect and scale-out (stateless reconnect, Kafka-backed reconnect, scale-out and fan-out), performance (binary Protobuf over WebSockets, optimizing throughput), the toolbox (testing, debugging, observability), and deploy. Appendix carries the model-generation pipeline, a deeper look at the backpressure behavior, Kafka dedup, the Newman and k6 scripts, the drift-gate pipeline figure, and the version matrix. Cross-references to the Quarkus WebSockets Next sibling are by concept, 'the same close code on both stacks,' never by slide number, so the deck survives a trim.</a:t>
             </a:r>
             <a:endParaRPr lang="en-US" dirty="0"/>
           </a:p>
@@ -1880,7 +1880,7 @@
           <a:p>
             <a:r>
               <a:rPr lang="en-US" dirty="0"/>
-              <a:t>Walks Ch15/16/18: when stateless reconnect is fine, the Kafka-backed backplane that closes the gap a stateless mode leaves open, the Redis Pub/Sub alternative, and the scale-out problem: a sticky session says nothing about where an event is produced.</a:t>
+              <a:t>Walks stateless reconnect, Kafka-backed reconnect, and scale-out and fan-out: when stateless reconnect is fine, the Kafka-backed backplane that closes the gap a stateless mode leaves open, the Redis Pub/Sub alternative, and the scale-out problem: a sticky session says nothing about where an event is produced.</a:t>
             </a:r>
             <a:endParaRPr lang="en-US" dirty="0"/>
           </a:p>
@@ -1968,7 +1968,7 @@
           <a:p>
             <a:r>
               <a:rPr lang="en-US" dirty="0"/>
-              <a:t>A test harness injects an event at instance B while the client is connected to instance A: exactly the gap a sticky load balancer can't close on its own. Three backplane modes share one interface: stateless (in-process only, Ch15), kafka (durable + replayable, Ch16), redis (live fan-out only, Ch18).</a:t>
+              <a:t>A test harness injects an event at instance B while the client is connected to instance A: exactly the gap a sticky load balancer can't close on its own. Three backplane modes share one interface: stateless (in-process only, the stateless-reconnect chapter), kafka (durable and replayable, the Kafka-backed-reconnect chapter), redis (live fan-out only, the scale-out chapter).</a:t>
             </a:r>
             <a:endParaRPr lang="en-US" dirty="0"/>
           </a:p>
@@ -2056,7 +2056,7 @@
           <a:p>
             <a:r>
               <a:rPr lang="en-US" dirty="0"/>
-              <a:t>This channel's own events fail the stateless test on two of three counts: every HandlingEvent is a discrete fact (a missed one is a missed fact, not a stale value), and there's no cheap full resync: the feed is the record, with no REST endpoint to re-GET the gap from. That's exactly why Ch16's Kafka-backed resume exists as the next slide.</a:t>
+              <a:t>This channel's own events fail the stateless test on two of three counts: every HandlingEvent is a discrete fact (a missed one is a missed fact, not a stale value), and there's no cheap full resync: the feed is the record, with no REST endpoint to re-GET the gap from. That's exactly why the Kafka-backed resume exists as the next slide.</a:t>
             </a:r>
             <a:endParaRPr lang="en-US" dirty="0"/>
           </a:p>
@@ -2144,7 +2144,7 @@
           <a:p>
             <a:r>
               <a:rPr lang="en-US" dirty="0"/>
-              <a:t>This is the default profile, and the Ch18 motivating contrast case: two instances behind a load balancer do not see each other's injected events. after_event_id is accepted purely for interface symmetry with the other two modes: this mode keeps no history at all, so a gap-era event is lost for a disconnected client, by design (PROTOCOL.md calls this the 'visible-gap proof').</a:t>
+              <a:t>This is the default profile, and the scale-out chapter's motivating contrast case: two instances behind a load balancer do not see each other's injected events. after_event_id is accepted purely for interface symmetry with the other two modes: this mode keeps no history at all, so a gap-era event is lost for a disconnected client, by design (PROTOCOL.md calls this the 'visible-gap proof').</a:t>
             </a:r>
             <a:endParaRPr lang="en-US" dirty="0"/>
           </a:p>
@@ -2408,7 +2408,7 @@
           <a:p>
             <a:r>
               <a:rPr lang="en-US" dirty="0"/>
-              <a:t>This is the Ch18 motivating picture: sticky sessions keep a client on one instance and nothing more: they say nothing about which instance an event is produced on. Without a backplane, instance A has no way to learn about something that happened at instance B. Only a shared Kafka topic or Redis channel crosses that gap.</a:t>
+              <a:t>This is the scale-out chapter's motivating picture: sticky sessions keep a client on one instance and nothing more: they say nothing about which instance an event is produced on. Without a backplane, instance A has no way to learn about something that happened at instance B. Only a shared Kafka topic or Redis channel crosses that gap.</a:t>
             </a:r>
             <a:endParaRPr lang="en-US" dirty="0"/>
           </a:p>
@@ -2496,7 +2496,7 @@
           <a:p>
             <a:r>
               <a:rPr lang="en-US" dirty="0"/>
-              <a:t>Opens with the Part 3 build (Ch9): one handler, one channel, pushing the fixture's three HandlingEvents on connect. The choice this whole section defends is using the raw `websockets` library instead of Starlette's bundled WebSocket support. That contrast is this section's throughline.</a:t>
+              <a:t>Opens with the Part 3 build (Python native websockets): one handler, one channel, pushing the fixture's three HandlingEvents on connect. The choice this whole section defends is using the raw `websockets` library instead of Starlette's bundled WebSocket support. That contrast is this section's throughline.</a:t>
             </a:r>
             <a:endParaRPr lang="en-US" dirty="0"/>
           </a:p>
@@ -2584,7 +2584,7 @@
           <a:p>
             <a:r>
               <a:rPr lang="en-US" dirty="0"/>
-              <a:t>verify.sh proves the same cross-instance delivery on both brokers, for both stacks: this is a trade-off, not a ranking. Kafka: durable, retained on disk, replayable (powers Ch16's resume), at the cost of topic/partition/offset bookkeeping. Redis: every subscriber gets every publish, live-only, no history; a dropped subscriber loses in-flight messages with nothing to catch it back up.</a:t>
+              <a:t>verify.sh proves the same cross-instance delivery on both brokers, for both stacks: this is a trade-off, not a ranking. Kafka: durable, retained on disk, replayable (powers the Kafka-backed reconnect), at the cost of topic/partition/offset bookkeeping. Redis: every subscriber gets every publish, live-only, no history; a dropped subscriber loses in-flight messages with nothing to catch it back up.</a:t>
             </a:r>
             <a:endParaRPr lang="en-US" dirty="0"/>
           </a:p>
@@ -2760,7 +2760,7 @@
           <a:p>
             <a:r>
               <a:rPr lang="en-US" dirty="0"/>
-              <a:t>One FastAPI route, one line that actually matters: `backplane.publish(bookingId, event)`. The polymorphism lives entirely behind the Backplane interface, so this endpoint has no idea whether it's talking to an in-process queue, a Kafka producer, or a Redis client. That's what lets tests and Ch18's demo script inject an event the same way regardless of which mode the instance was started in.</a:t>
+              <a:t>One FastAPI route, one line that actually matters: `backplane.publish(bookingId, event)`. The polymorphism lives entirely behind the Backplane interface, so this endpoint has no idea whether it's talking to an in-process queue, a Kafka producer, or a Redis client. That's what lets tests and the scale-out chapter's demo script inject an event the same way regardless of which mode the instance was started in.</a:t>
             </a:r>
             <a:endParaRPr lang="en-US" dirty="0"/>
           </a:p>
@@ -2848,7 +2848,7 @@
           <a:p>
             <a:r>
               <a:rPr lang="en-US" dirty="0"/>
-              <a:t>Walks Ch19/20: negotiating a second wire encoding by subprotocol, why field numbers (not key names) are Protobuf's real contract, and the four levers that sit under Ch12's backpressure ceiling: encoding, batching, compression, size limits.</a:t>
+              <a:t>Walks binary Protobuf over WebSockets and optimizing throughput: negotiating a second wire encoding by subprotocol, why field numbers (not key names) are Protobuf's real contract, and the four levers that sit under the backpressure ceiling: encoding, batching, compression, size limits.</a:t>
             </a:r>
             <a:endParaRPr lang="en-US" dirty="0"/>
           </a:p>
@@ -3200,7 +3200,7 @@
           <a:p>
             <a:r>
               <a:rPr lang="en-US" dirty="0"/>
-              <a:t>check-proto-parity.py fails the build the moment either side adds, removes, or reorders a field the other side doesn't also carry: field numbers are additive-only, the same discipline Ch7's JSON contract already enforces on key names, just enforced differently because the two encodings carry their contract in different places.</a:t>
+              <a:t>check-proto-parity.py fails the build the moment either side adds, removes, or reorders a field the other side doesn't also carry: field numbers are additive-only, the same discipline the versioning-and-evolution chapter's JSON contract already enforces on key names, just enforced differently because the two encodings carry their contract in different places.</a:t>
             </a:r>
             <a:endParaRPr lang="en-US" dirty="0"/>
           </a:p>
@@ -3288,7 +3288,7 @@
           <a:p>
             <a:r>
               <a:rPr lang="en-US" dirty="0"/>
-              <a:t>Encoding (Protobuf vs. JSON) is a fixed, load-independent discount: 40.7% smaller, identical at any connection rate. Batching trades latency for fewer, larger frames. Compression is a per-stack opt-in, not a universal default (next slide). Size limits bound a single frame regardless of queue depth. None of the four changes whether or when Ch12's backpressure bound trips: they only change how much useful work fits before hitting it.</a:t>
+              <a:t>Encoding (Protobuf vs. JSON) is a fixed, load-independent discount: 40.7% smaller, identical at any connection rate. Batching trades latency for fewer, larger frames. Compression is a per-stack opt-in, not a universal default (next slide). Size limits bound a single frame regardless of queue depth. None of the four changes whether or when the backpressure bound trips: they only change how much useful work fits before hitting it.</a:t>
             </a:r>
             <a:endParaRPr lang="en-US" dirty="0"/>
           </a:p>
@@ -3376,7 +3376,7 @@
           <a:p>
             <a:r>
               <a:rPr lang="en-US" dirty="0"/>
-              <a:t>What isn't on screen is the point: serve()'s own signature defaults to compression="deflate" and a real 1 MiB max_size, neither overridden here: every connection to Python's :8091 negotiates permessage-deflate unless a caller explicitly opts out. Ch20's own measurement found Quarkus WebSockets Next takes the opposite stance (off unless per-message-compression-supported=true is set): the same benchmark request negotiated deflate on 100% of Python's connects and 0% of Quarkus's.</a:t>
+              <a:t>What isn't on screen is the point: serve()'s own signature defaults to compression="deflate" and a real 1 MiB max_size, neither overridden here: every connection to Python's :8091 negotiates permessage-deflate unless a caller explicitly opts out. The optimizing-throughput chapter's own measurement found Quarkus WebSockets Next takes the opposite stance (off unless per-message-compression-supported=true is set): the same benchmark request negotiated deflate on 100% of Python's connects and 0% of Quarkus's.</a:t>
             </a:r>
             <a:endParaRPr lang="en-US" dirty="0"/>
           </a:p>
@@ -3552,7 +3552,7 @@
           <a:p>
             <a:r>
               <a:rPr lang="en-US" dirty="0"/>
-              <a:t>k6/ws is built on gorilla/websocket, which transparently inflates a compressed frame before the script ever sees its bytes: the json_deflate row reading identical to plain json is a measurement-tool limitation, not proof deflate had no effect on the wire. What the benchmark can prove without inference is the negotiation outcome itself: Python 7908/7908 (100%), Quarkus 0 out of 11806-18292 across three runs (0%), the one number this chapter treats as proven rather than inferred.</a:t>
+              <a:t>k6/ws is built on gorilla/websocket, which transparently inflates a compressed frame before the script ever sees its bytes: the json_deflate row reading identical to plain json is a measurement-tool blind spot, not proof deflate had no effect on the wire. What the benchmark can prove without inference is the negotiation outcome itself: Python 7908/7908 (100%), Quarkus 0 out of 11806-18292 across three runs (0%), the one number this chapter treats as proven rather than inferred.</a:t>
             </a:r>
             <a:endParaRPr lang="en-US" dirty="0"/>
           </a:p>
@@ -3640,7 +3640,7 @@
           <a:p>
             <a:r>
               <a:rPr lang="en-US" dirty="0"/>
-              <a:t>Walks Ch21/22/23: the five-tool test pyramid behind every example in this series, a symptom-to-tool map for live debugging, and the hand-written OpenTelemetry span Python needs where Quarkus gets one through auto-instrumentation alone.</a:t>
+              <a:t>Walks testing, debugging, and observability: the five-tool test pyramid behind every example in this series, a symptom-to-tool map for live debugging, and the hand-written OpenTelemetry span Python needs where Quarkus gets one through auto-instrumentation alone.</a:t>
             </a:r>
             <a:endParaRPr lang="en-US" dirty="0"/>
           </a:p>
@@ -3816,7 +3816,7 @@
           <a:p>
             <a:r>
               <a:rPr lang="en-US" dirty="0"/>
-              <a:t>Never upgrades at all → curl --include the upgrade request. 101 then silence → DevTools Frames tab or websocat -t. Wrong frame shape → websocat -b piped to xxd (an opcode mismatch, Ch19's JSON-vs-binary negotiation gone wrong). Drops with no obvious reason → python ws_close_probe plus the server's trace-id logs: the close code says why (4400, 4290, 4408, 1008; 1006 means no code arrived at all). Dies after sustained load → tcpdump plus server logs over time, looking for backpressure or the liveness sweep firing under pressure.</a:t>
+              <a:t>Never upgrades at all → curl --include the upgrade request. 101 then silence → DevTools Frames tab or websocat -t. Wrong frame shape → websocat -b piped to xxd (an opcode mismatch, the binary-Protobuf chapter's JSON-vs-binary negotiation gone wrong). Drops with no obvious reason → python ws_close_probe plus the server's trace-id logs: the close code says why (4400, 4290, 4408, 1008; 1006 means no code arrived at all). Dies after sustained load → tcpdump plus server logs over time, looking for backpressure or the liveness sweep firing under pressure.</a:t>
             </a:r>
             <a:endParaRPr lang="en-US" dirty="0"/>
           </a:p>
@@ -3904,7 +3904,7 @@
           <a:p>
             <a:r>
               <a:rPr lang="en-US" dirty="0"/>
-              <a:t>This is the Ch23 finding this whole section exists to demonstrate: there is no opentelemetry-instrumentation-websockets package, and the native websockets library has no OTel hook of its own. A trace that only covered the HTTP side (which is auto-instrumented via opentelemetry-instrumentation-fastapi) would never show the WS connection at all, so this module starts the entire connection span by hand.</a:t>
+              <a:t>This is what this whole section exists to demonstrate: there is no opentelemetry-instrumentation-websockets package, and the native websockets library has no OTel hook of its own. A trace that only covered the HTTP side (which is auto-instrumented via opentelemetry-instrumentation-fastapi) would never show the WS connection at all, so this module starts the entire connection span by hand.</a:t>
             </a:r>
             <a:endParaRPr lang="en-US" dirty="0"/>
           </a:p>
@@ -4256,7 +4256,7 @@
           <a:p>
             <a:r>
               <a:rPr lang="en-US" dirty="0"/>
-              <a:t>This is Appendix A's own finding: Python's build path is structurally different from the Quarkus one because there's no S2I builder image for it, not because anyone chose a harder path by preference. The throwaway build-context directory is the workaround: it has to mirror the exact repo-root-relative paths the Containerfile's COPY lines expect, including the shared AsyncAPI contract and the schema-extraction script, none of which live inside python/ itself.</a:t>
+              <a:t>Python's build path is structurally different from the Quarkus one because there's no S2I builder image for it, not because anyone chose a harder path by preference. The throwaway build-context directory exists to mirror the exact repo-root-relative paths the Containerfile's COPY lines expect, including the shared AsyncAPI contract and the schema-extraction script, none of which live inside python/ itself.</a:t>
             </a:r>
             <a:endParaRPr lang="en-US" dirty="0"/>
           </a:p>
@@ -4432,7 +4432,7 @@
           <a:p>
             <a:r>
               <a:rPr lang="en-US" dirty="0"/>
-              <a:t>websocket.request.path carries the full request-target; the channel regex is matched against it directly here (Part 4 later has to split off a query string for the token). sequence_as_json() reuses the same generated model the conformance test validates against: nothing hand-written sits between the contract and this send() call. No subprotocol is enforced yet: passing subprotocols= to serve() would reject any client that didn't offer one, breaking plain clients for no behavior this example implements. Ch17 is where that changes.</a:t>
+              <a:t>websocket.request.path carries the full request-target; the channel regex is matched against it directly here (Part 4 later has to split off a query string for the token). sequence_as_json() reuses the same generated model the conformance test validates against: nothing hand-written sits between the contract and this send() call. No subprotocol is enforced yet: passing subprotocols= to serve() would reject any client that didn't offer one, breaking plain clients for no behavior this example implements. The security chapter is where that changes.</a:t>
             </a:r>
             <a:endParaRPr lang="en-US" dirty="0"/>
           </a:p>
@@ -4608,7 +4608,7 @@
           <a:p>
             <a:r>
               <a:rPr lang="en-US" dirty="0"/>
-              <a:t>Reference material: the datamodel-codegen pipeline as a shell script, a deeper look at the maxsize=0 backpressure gotcha, Kafka's dedup-by-eventId mechanism, the Newman and k6 scripts behind the test pyramid, the drift-gate pipeline figure, and the version matrix this deck's version claims are checked against.</a:t>
+              <a:t>Reference material: the datamodel-codegen pipeline as a shell script, a deeper look at the maxsize=0 backpressure behavior, Kafka's dedup-by-eventId mechanism, the Newman and k6 scripts behind the test pyramid, the drift-gate pipeline figure, and the version matrix this deck's version claims are checked against.</a:t>
             </a:r>
             <a:endParaRPr lang="en-US" dirty="0"/>
           </a:p>
@@ -4960,7 +4960,7 @@
           <a:p>
             <a:r>
               <a:rPr lang="en-US" dirty="0"/>
-              <a:t>Newman's whole reason for being in this stack: it only ever exercises HTTP, the health probes and the backplane's inject endpoint, because those are REST surfaces a Postman-style collection can drive directly. Everything WebSocket-shaped (the upgrade itself, a close code, a binary frame) is explicitly out of Newman's reach and falls to verify.sh/lib.sh and the Python close-code probe instead: that division of labor is the Ch21 test-pyramid's functional tier.</a:t>
+              <a:t>Newman's whole reason for being in this stack: it only ever exercises HTTP, the health probes and the backplane's inject endpoint, because those are REST surfaces a Postman-style collection can drive directly. Everything WebSocket-shaped (the upgrade itself, a close code, a binary frame) is explicitly out of Newman's reach and falls to verify.sh/lib.sh and the Python close-code probe instead: that division of labor is the testing chapter's test-pyramid functional tier.</a:t>
             </a:r>
             <a:endParaRPr lang="en-US" dirty="0"/>
           </a:p>
@@ -5400,7 +5400,7 @@
           <a:p>
             <a:r>
               <a:rPr lang="en-US" dirty="0"/>
-              <a:t>This is an architectural choice worth defending out loud: `websockets` is a focused, asyncio-native library built for exactly one protocol, with direct control over ping/pong, subprotocol negotiation, and close codes, all of which this deck's later slides lean on directly (Ch14's ping_interval/ping_timeout as a serve() kwarg, Ch17's close-code-only auth rejection). FastAPI/Starlette's bundled WebSocket support exists, but it isn't what this series is teaching.</a:t>
+              <a:t>This is an architectural choice worth defending out loud: `websockets` is a focused, asyncio-native library built for exactly one protocol, with direct control over ping/pong, subprotocol negotiation, and close codes, all of which this deck's later slides lean on directly (liveness's ping_interval/ping_timeout as a serve() kwarg, security's close-code-only auth rejection). FastAPI/Starlette's bundled WebSocket support exists, but it isn't what this series is teaching.</a:t>
             </a:r>
             <a:endParaRPr lang="en-US" dirty="0"/>
           </a:p>
@@ -10511,7 +10511,7 @@
                 <a:ea typeface="Red Hat Text" pitchFamily="34" charset="-122"/>
                 <a:cs typeface="Red Hat Text" pitchFamily="34" charset="-120"/>
               </a:rPr>
-              <a:t>Appendix: model-generation pipeline, the maxsize=0 gotcha, dedup-by-eventId, Newman + k6, the drift gate, version matrix</a:t>
+              <a:t>Appendix: model-generation pipeline, the maxsize=0 behavior, dedup-by-eventId, Newman + k6, the drift gate, version matrix</a:t>
             </a:r>
             <a:endParaRPr lang="en-US" sz="1700" dirty="0"/>
           </a:p>
@@ -11827,7 +11827,7 @@
                 <a:ea typeface="Red Hat Mono" pitchFamily="34" charset="-122"/>
                 <a:cs typeface="Red Hat Mono" pitchFamily="34" charset="-120"/>
               </a:rPr>
-              <a:t># app/ws_server.py — called right after the upgrade, before any frame is sent:
+              <a:t># app/ws_server.py, called right after the upgrade, before any frame is sent:
 </a:t>
             </a:r>
             <a:pPr algn="l" indent="0" marL="0">
@@ -17870,7 +17870,7 @@
                 <a:ea typeface="Red Hat Text" pitchFamily="34" charset="-122"/>
                 <a:cs typeface="Red Hat Text" pitchFamily="34" charset="-120"/>
               </a:rPr>
-              <a:t>Figure 20.2. four throughput levers, one shared ceiling: Chapter 12's bounded outbound queue governs every byte every lever above it produces.</a:t>
+              <a:t>Figure 20.2. four throughput levers, one shared ceiling: the bounded outbound queue governs every byte every lever above it produces.</a:t>
             </a:r>
             <a:endParaRPr lang="en-US" sz="1300" dirty="0"/>
           </a:p>
@@ -22461,7 +22461,7 @@
                 <a:ea typeface="Red Hat Text" pitchFamily="34" charset="-122"/>
                 <a:cs typeface="Red Hat Text" pitchFamily="34" charset="-120"/>
               </a:rPr>
-              <a:t>The model-generation pipeline, the gotchas, the test scripts, and the version matrix.</a:t>
+              <a:t>The model-generation pipeline, the edge cases, the test scripts, and the version matrix.</a:t>
             </a:r>
             <a:endParaRPr lang="en-US" sz="1600" dirty="0"/>
           </a:p>
@@ -23248,7 +23248,7 @@
                 <a:ea typeface="Overpass" pitchFamily="34" charset="-122"/>
                 <a:cs typeface="Overpass" pitchFamily="34" charset="-120"/>
               </a:rPr>
-              <a:t>APPENDIX · THE maxsize=0 GOTCHA, DEEPER</a:t>
+              <a:t>APPENDIX · THE maxsize=0 SETTING, DEEPER</a:t>
             </a:r>
             <a:endParaRPr lang="en-US" sz="1200" dirty="0"/>
           </a:p>
@@ -24723,7 +24723,7 @@
                 <a:ea typeface="Red Hat Text" pitchFamily="34" charset="-122"/>
                 <a:cs typeface="Red Hat Text" pitchFamily="34" charset="-120"/>
               </a:rPr>
-              <a:t>examples/part6-testing/newman/collection.json. The HTTP surfaces: health probes and the Ch18 inject endpoint, both stacks</a:t>
+              <a:t>examples/part6-testing/newman/collection.json. The HTTP surfaces: health probes and the inject endpoint, both stacks</a:t>
             </a:r>
             <a:endParaRPr lang="en-US" sz="1300" dirty="0"/>
           </a:p>
@@ -27787,7 +27787,7 @@
                 <a:ea typeface="Red Hat Text" pitchFamily="34" charset="-122"/>
                 <a:cs typeface="Red Hat Text" pitchFamily="34" charset="-120"/>
               </a:rPr>
-              <a:t>Starlette's WebSocket support is exactly what Ch9 is contrasting against: this example runs the raw `websockets` library instead, on its own asyncio listener, side by side with a small FastAPI app that owns only HTTP and lifecycle.</a:t>
+              <a:t>Starlette's WebSocket support is exactly what this chapter is contrasting against: this example runs the raw `websockets` library instead, on its own asyncio listener, side by side with a small FastAPI app that owns only HTTP and lifecycle.</a:t>
             </a:r>
             <a:endParaRPr lang="en-US" sz="1700" dirty="0"/>
           </a:p>
